--- a/m1/diapositivos/sessao-09-m1-f10.pptx
+++ b/m1/diapositivos/sessao-09-m1-f10.pptx
@@ -2624,11 +2624,8 @@
                 <a:ea typeface="Georgia" pitchFamily="34" charset="-122"/>
                 <a:cs typeface="Georgia" pitchFamily="34" charset="-120"/>
               </a:rPr>
-              <a:t>Como Fernão Lopes: 1. confronta pelo menos duas fontes; 2. começa num momento concreto; 3. põe o leitor lá, com som, cor e movimento; 4. mostra a figura no meio de outras pessoas (atores individuais e coletivos); 5. inclui uma fala em discurso direto e assinala se é documentada ou imaginada.</a:t>
-            </a:r>
-            <a:endParaRPr lang="en-US" sz="2300" dirty="0"/>
-          </a:p>
-          <a:p>
+              <a:t>Como Fernão Lopes: </a:t>
+            </a:r>
             <a:pPr indent="0" marL="0">
               <a:lnSpc>
                 <a:spcPct val="120000"/>
@@ -2639,7 +2636,7 @@
               <a:buNone/>
             </a:pPr>
             <a:r>
-              <a:rPr lang="en-US" sz="2300" dirty="0">
+              <a:rPr lang="en-US" sz="2300" b="1" dirty="0">
                 <a:solidFill>
                   <a:srgbClr val="F2F0EA"/>
                 </a:solidFill>
@@ -2647,7 +2644,267 @@
                 <a:ea typeface="Georgia" pitchFamily="34" charset="-122"/>
                 <a:cs typeface="Georgia" pitchFamily="34" charset="-120"/>
               </a:rPr>
-              <a:t>Para quem: leitores de uma revista de história para jovens. Esta crónica é a etapa 1 do Projeto do ano.</a:t>
+              <a:t>1.</a:t>
+            </a:r>
+            <a:pPr indent="0" marL="0">
+              <a:lnSpc>
+                <a:spcPct val="120000"/>
+              </a:lnSpc>
+              <a:spcAft>
+                <a:spcPts val="1000"/>
+              </a:spcAft>
+              <a:buNone/>
+            </a:pPr>
+            <a:r>
+              <a:rPr lang="en-US" sz="2300" dirty="0">
+                <a:solidFill>
+                  <a:srgbClr val="F2F0EA"/>
+                </a:solidFill>
+                <a:latin typeface="Georgia" pitchFamily="34" charset="0"/>
+                <a:ea typeface="Georgia" pitchFamily="34" charset="-122"/>
+                <a:cs typeface="Georgia" pitchFamily="34" charset="-120"/>
+              </a:rPr>
+              <a:t> confronta pelo menos duas fontes; </a:t>
+            </a:r>
+            <a:pPr indent="0" marL="0">
+              <a:lnSpc>
+                <a:spcPct val="120000"/>
+              </a:lnSpc>
+              <a:spcAft>
+                <a:spcPts val="1000"/>
+              </a:spcAft>
+              <a:buNone/>
+            </a:pPr>
+            <a:r>
+              <a:rPr lang="en-US" sz="2300" b="1" dirty="0">
+                <a:solidFill>
+                  <a:srgbClr val="F2F0EA"/>
+                </a:solidFill>
+                <a:latin typeface="Georgia" pitchFamily="34" charset="0"/>
+                <a:ea typeface="Georgia" pitchFamily="34" charset="-122"/>
+                <a:cs typeface="Georgia" pitchFamily="34" charset="-120"/>
+              </a:rPr>
+              <a:t>2.</a:t>
+            </a:r>
+            <a:pPr indent="0" marL="0">
+              <a:lnSpc>
+                <a:spcPct val="120000"/>
+              </a:lnSpc>
+              <a:spcAft>
+                <a:spcPts val="1000"/>
+              </a:spcAft>
+              <a:buNone/>
+            </a:pPr>
+            <a:r>
+              <a:rPr lang="en-US" sz="2300" dirty="0">
+                <a:solidFill>
+                  <a:srgbClr val="F2F0EA"/>
+                </a:solidFill>
+                <a:latin typeface="Georgia" pitchFamily="34" charset="0"/>
+                <a:ea typeface="Georgia" pitchFamily="34" charset="-122"/>
+                <a:cs typeface="Georgia" pitchFamily="34" charset="-120"/>
+              </a:rPr>
+              <a:t> começa num momento concreto; </a:t>
+            </a:r>
+            <a:pPr indent="0" marL="0">
+              <a:lnSpc>
+                <a:spcPct val="120000"/>
+              </a:lnSpc>
+              <a:spcAft>
+                <a:spcPts val="1000"/>
+              </a:spcAft>
+              <a:buNone/>
+            </a:pPr>
+            <a:r>
+              <a:rPr lang="en-US" sz="2300" b="1" dirty="0">
+                <a:solidFill>
+                  <a:srgbClr val="F2F0EA"/>
+                </a:solidFill>
+                <a:latin typeface="Georgia" pitchFamily="34" charset="0"/>
+                <a:ea typeface="Georgia" pitchFamily="34" charset="-122"/>
+                <a:cs typeface="Georgia" pitchFamily="34" charset="-120"/>
+              </a:rPr>
+              <a:t>3.</a:t>
+            </a:r>
+            <a:pPr indent="0" marL="0">
+              <a:lnSpc>
+                <a:spcPct val="120000"/>
+              </a:lnSpc>
+              <a:spcAft>
+                <a:spcPts val="1000"/>
+              </a:spcAft>
+              <a:buNone/>
+            </a:pPr>
+            <a:r>
+              <a:rPr lang="en-US" sz="2300" dirty="0">
+                <a:solidFill>
+                  <a:srgbClr val="F2F0EA"/>
+                </a:solidFill>
+                <a:latin typeface="Georgia" pitchFamily="34" charset="0"/>
+                <a:ea typeface="Georgia" pitchFamily="34" charset="-122"/>
+                <a:cs typeface="Georgia" pitchFamily="34" charset="-120"/>
+              </a:rPr>
+              <a:t> põe o leitor lá, com som, cor e movimento; </a:t>
+            </a:r>
+            <a:pPr indent="0" marL="0">
+              <a:lnSpc>
+                <a:spcPct val="120000"/>
+              </a:lnSpc>
+              <a:spcAft>
+                <a:spcPts val="1000"/>
+              </a:spcAft>
+              <a:buNone/>
+            </a:pPr>
+            <a:r>
+              <a:rPr lang="en-US" sz="2300" b="1" dirty="0">
+                <a:solidFill>
+                  <a:srgbClr val="F2F0EA"/>
+                </a:solidFill>
+                <a:latin typeface="Georgia" pitchFamily="34" charset="0"/>
+                <a:ea typeface="Georgia" pitchFamily="34" charset="-122"/>
+                <a:cs typeface="Georgia" pitchFamily="34" charset="-120"/>
+              </a:rPr>
+              <a:t>4.</a:t>
+            </a:r>
+            <a:pPr indent="0" marL="0">
+              <a:lnSpc>
+                <a:spcPct val="120000"/>
+              </a:lnSpc>
+              <a:spcAft>
+                <a:spcPts val="1000"/>
+              </a:spcAft>
+              <a:buNone/>
+            </a:pPr>
+            <a:r>
+              <a:rPr lang="en-US" sz="2300" dirty="0">
+                <a:solidFill>
+                  <a:srgbClr val="F2F0EA"/>
+                </a:solidFill>
+                <a:latin typeface="Georgia" pitchFamily="34" charset="0"/>
+                <a:ea typeface="Georgia" pitchFamily="34" charset="-122"/>
+                <a:cs typeface="Georgia" pitchFamily="34" charset="-120"/>
+              </a:rPr>
+              <a:t> mostra a figura no meio de outras pessoas (atores individuais e coletivos); </a:t>
+            </a:r>
+            <a:pPr indent="0" marL="0">
+              <a:lnSpc>
+                <a:spcPct val="120000"/>
+              </a:lnSpc>
+              <a:spcAft>
+                <a:spcPts val="1000"/>
+              </a:spcAft>
+              <a:buNone/>
+            </a:pPr>
+            <a:r>
+              <a:rPr lang="en-US" sz="2300" b="1" dirty="0">
+                <a:solidFill>
+                  <a:srgbClr val="F2F0EA"/>
+                </a:solidFill>
+                <a:latin typeface="Georgia" pitchFamily="34" charset="0"/>
+                <a:ea typeface="Georgia" pitchFamily="34" charset="-122"/>
+                <a:cs typeface="Georgia" pitchFamily="34" charset="-120"/>
+              </a:rPr>
+              <a:t>5.</a:t>
+            </a:r>
+            <a:pPr indent="0" marL="0">
+              <a:lnSpc>
+                <a:spcPct val="120000"/>
+              </a:lnSpc>
+              <a:spcAft>
+                <a:spcPts val="1000"/>
+              </a:spcAft>
+              <a:buNone/>
+            </a:pPr>
+            <a:r>
+              <a:rPr lang="en-US" sz="2300" dirty="0">
+                <a:solidFill>
+                  <a:srgbClr val="F2F0EA"/>
+                </a:solidFill>
+                <a:latin typeface="Georgia" pitchFamily="34" charset="0"/>
+                <a:ea typeface="Georgia" pitchFamily="34" charset="-122"/>
+                <a:cs typeface="Georgia" pitchFamily="34" charset="-120"/>
+              </a:rPr>
+              <a:t> inclui uma fala em discurso direto e assinala se é documentada ou imaginada. </a:t>
+            </a:r>
+            <a:pPr indent="0" marL="0">
+              <a:lnSpc>
+                <a:spcPct val="120000"/>
+              </a:lnSpc>
+              <a:spcAft>
+                <a:spcPts val="1000"/>
+              </a:spcAft>
+              <a:buNone/>
+            </a:pPr>
+            <a:r>
+              <a:rPr lang="en-US" sz="2300" b="1" dirty="0">
+                <a:solidFill>
+                  <a:srgbClr val="F2F0EA"/>
+                </a:solidFill>
+                <a:latin typeface="Georgia" pitchFamily="34" charset="0"/>
+                <a:ea typeface="Georgia" pitchFamily="34" charset="-122"/>
+                <a:cs typeface="Georgia" pitchFamily="34" charset="-120"/>
+              </a:rPr>
+              <a:t>Para quem:</a:t>
+            </a:r>
+            <a:pPr indent="0" marL="0">
+              <a:lnSpc>
+                <a:spcPct val="120000"/>
+              </a:lnSpc>
+              <a:spcAft>
+                <a:spcPts val="1000"/>
+              </a:spcAft>
+              <a:buNone/>
+            </a:pPr>
+            <a:r>
+              <a:rPr lang="en-US" sz="2300" dirty="0">
+                <a:solidFill>
+                  <a:srgbClr val="F2F0EA"/>
+                </a:solidFill>
+                <a:latin typeface="Georgia" pitchFamily="34" charset="0"/>
+                <a:ea typeface="Georgia" pitchFamily="34" charset="-122"/>
+                <a:cs typeface="Georgia" pitchFamily="34" charset="-120"/>
+              </a:rPr>
+              <a:t> leitores de uma revista de história para jovens. Esta crónica é a </a:t>
+            </a:r>
+            <a:pPr indent="0" marL="0">
+              <a:lnSpc>
+                <a:spcPct val="120000"/>
+              </a:lnSpc>
+              <a:spcAft>
+                <a:spcPts val="1000"/>
+              </a:spcAft>
+              <a:buNone/>
+            </a:pPr>
+            <a:r>
+              <a:rPr lang="en-US" sz="2300" b="1" dirty="0">
+                <a:solidFill>
+                  <a:srgbClr val="F2F0EA"/>
+                </a:solidFill>
+                <a:latin typeface="Georgia" pitchFamily="34" charset="0"/>
+                <a:ea typeface="Georgia" pitchFamily="34" charset="-122"/>
+                <a:cs typeface="Georgia" pitchFamily="34" charset="-120"/>
+              </a:rPr>
+              <a:t>etapa 1 do Projeto do ano</a:t>
+            </a:r>
+            <a:pPr indent="0" marL="0">
+              <a:lnSpc>
+                <a:spcPct val="120000"/>
+              </a:lnSpc>
+              <a:spcAft>
+                <a:spcPts val="1000"/>
+              </a:spcAft>
+              <a:buNone/>
+            </a:pPr>
+            <a:r>
+              <a:rPr lang="en-US" sz="2300" dirty="0">
+                <a:solidFill>
+                  <a:srgbClr val="F2F0EA"/>
+                </a:solidFill>
+                <a:latin typeface="Georgia" pitchFamily="34" charset="0"/>
+                <a:ea typeface="Georgia" pitchFamily="34" charset="-122"/>
+                <a:cs typeface="Georgia" pitchFamily="34" charset="-120"/>
+              </a:rPr>
+              <a:t>.</a:t>
             </a:r>
             <a:endParaRPr lang="en-US" sz="2300" dirty="0"/>
           </a:p>
